--- a/docs/events/1/cnck-kube-community-night.pptx
+++ b/docs/events/1/cnck-kube-community-night.pptx
@@ -26035,8 +26035,8 @@
         </p:nvSpPr>
         <p:spPr>
           <a:xfrm>
-            <a:off x="731520" y="2194560"/>
-            <a:ext cx="10698480" cy="1097280"/>
+            <a:off x="731520" y="914400"/>
+            <a:ext cx="10698480" cy="822960"/>
           </a:xfrm>
           <a:prstGeom prst="rect">
             <a:avLst/>
@@ -26050,7 +26050,7 @@
           <a:lstStyle/>
           <a:p>
             <a:pPr algn="ctr">
-              <a:defRPr sz="5200" b="1">
+              <a:defRPr sz="4400" b="1">
                 <a:solidFill>
                   <a:srgbClr val="1B365D"/>
                 </a:solidFill>
@@ -26071,8 +26071,8 @@
         </p:nvSpPr>
         <p:spPr>
           <a:xfrm>
-            <a:off x="731520" y="3566160"/>
-            <a:ext cx="10698480" cy="548640"/>
+            <a:off x="731520" y="1810512"/>
+            <a:ext cx="10698480" cy="457200"/>
           </a:xfrm>
           <a:prstGeom prst="rect">
             <a:avLst/>
@@ -26086,7 +26086,7 @@
           <a:lstStyle/>
           <a:p>
             <a:pPr algn="ctr">
-              <a:defRPr sz="2400" b="1">
+              <a:defRPr sz="2000" b="1">
                 <a:solidFill>
                   <a:srgbClr val="0080CC"/>
                 </a:solidFill>
@@ -26099,15 +26099,39 @@
           </a:p>
         </p:txBody>
       </p:sp>
-      <p:sp>
-        <p:nvSpPr>
-          <p:cNvPr id="7" name="TextBox 6"/>
+      <p:pic>
+        <p:nvPicPr>
+          <p:cNvPr id="7" name="Picture 6" descr="kubeCommunityNight-qr.png"/>
+          <p:cNvPicPr>
+            <a:picLocks noChangeAspect="1"/>
+          </p:cNvPicPr>
+          <p:nvPr/>
+        </p:nvPicPr>
+        <p:blipFill>
+          <a:blip r:embed="rId2"/>
+          <a:stretch>
+            <a:fillRect/>
+          </a:stretch>
+        </p:blipFill>
+        <p:spPr>
+          <a:xfrm>
+            <a:off x="4495647" y="2331720"/>
+            <a:ext cx="3200400" cy="3200400"/>
+          </a:xfrm>
+          <a:prstGeom prst="rect">
+            <a:avLst/>
+          </a:prstGeom>
+        </p:spPr>
+      </p:pic>
+      <p:sp>
+        <p:nvSpPr>
+          <p:cNvPr id="8" name="TextBox 7"/>
           <p:cNvSpPr txBox="1"/>
           <p:nvPr/>
         </p:nvSpPr>
         <p:spPr>
           <a:xfrm>
-            <a:off x="731520" y="4206240"/>
+            <a:off x="731520" y="5715000"/>
             <a:ext cx="10698480" cy="457200"/>
           </a:xfrm>
           <a:prstGeom prst="rect">
@@ -26122,7 +26146,7 @@
           <a:lstStyle/>
           <a:p>
             <a:pPr algn="ctr">
-              <a:defRPr sz="1800" b="0">
+              <a:defRPr sz="1600" b="0">
                 <a:solidFill>
                   <a:srgbClr val="555E6E"/>
                 </a:solidFill>

--- a/docs/events/1/cnck-kube-community-night.pptx
+++ b/docs/events/1/cnck-kube-community-night.pptx
@@ -11974,7 +11974,7 @@
         </p:nvSpPr>
         <p:spPr>
           <a:xfrm>
-            <a:off x="731520" y="1097280"/>
+            <a:off x="731520" y="640080"/>
             <a:ext cx="10698480" cy="548640"/>
           </a:xfrm>
           <a:prstGeom prst="rect">
@@ -12010,8 +12010,8 @@
         </p:nvSpPr>
         <p:spPr>
           <a:xfrm>
-            <a:off x="731520" y="2011680"/>
-            <a:ext cx="10698480" cy="1371600"/>
+            <a:off x="731520" y="1234440"/>
+            <a:ext cx="10698480" cy="1188720"/>
           </a:xfrm>
           <a:prstGeom prst="rect">
             <a:avLst/>
@@ -12025,7 +12025,7 @@
           <a:lstStyle/>
           <a:p>
             <a:pPr algn="ctr">
-              <a:defRPr sz="6400" b="1">
+              <a:defRPr sz="5800" b="1">
                 <a:solidFill>
                   <a:srgbClr val="FFFFFF"/>
                 </a:solidFill>
@@ -12046,8 +12046,8 @@
         </p:nvSpPr>
         <p:spPr>
           <a:xfrm>
-            <a:off x="731520" y="3474720"/>
-            <a:ext cx="10698480" cy="731520"/>
+            <a:off x="731520" y="2606040"/>
+            <a:ext cx="10698480" cy="502920"/>
           </a:xfrm>
           <a:prstGeom prst="rect">
             <a:avLst/>
@@ -12061,7 +12061,7 @@
           <a:lstStyle/>
           <a:p>
             <a:pPr algn="ctr">
-              <a:defRPr sz="2400" b="0">
+              <a:defRPr sz="2200" b="0">
                 <a:solidFill>
                   <a:srgbClr val="D0E8F7"/>
                 </a:solidFill>
@@ -12069,7 +12069,7 @@
               </a:defRPr>
             </a:pPr>
             <a:r>
-              <a:t>CNCF 5대 자격증을 모두 취득한</a:t>
+              <a:t>CNCF 자격증을 모두 취득한</a:t>
             </a:r>
           </a:p>
         </p:txBody>
@@ -12082,8 +12082,8 @@
         </p:nvSpPr>
         <p:spPr>
           <a:xfrm>
-            <a:off x="731520" y="4023360"/>
-            <a:ext cx="10698480" cy="731520"/>
+            <a:off x="731520" y="3154680"/>
+            <a:ext cx="10698480" cy="640080"/>
           </a:xfrm>
           <a:prstGeom prst="rect">
             <a:avLst/>
@@ -12097,7 +12097,7 @@
           <a:lstStyle/>
           <a:p>
             <a:pPr algn="ctr">
-              <a:defRPr sz="2800" b="1">
+              <a:defRPr sz="2700" b="1">
                 <a:solidFill>
                   <a:srgbClr val="FFFFFF"/>
                 </a:solidFill>
@@ -12126,8 +12126,8 @@
         </p:blipFill>
         <p:spPr>
           <a:xfrm>
-            <a:off x="3200400" y="4572000"/>
-            <a:ext cx="1645920" cy="1645920"/>
+            <a:off x="3480010" y="3931920"/>
+            <a:ext cx="2468880" cy="2468880"/>
           </a:xfrm>
           <a:prstGeom prst="rect">
             <a:avLst/>
@@ -12150,8 +12150,8 @@
         </p:blipFill>
         <p:spPr>
           <a:xfrm>
-            <a:off x="6858000" y="4572000"/>
-            <a:ext cx="1959429" cy="1645920"/>
+            <a:off x="6588970" y="4274820"/>
+            <a:ext cx="2122714" cy="1783080"/>
           </a:xfrm>
           <a:prstGeom prst="rect">
             <a:avLst/>
